--- a/guides-pptx/spryker-academy-ai.pptx
+++ b/guides-pptx/spryker-academy-ai.pptx
@@ -15233,7 +15233,7 @@
               </a:defRPr>
             </a:pPr>
             <a:r>
-              <a:t>01-back-office-assistant-setup</a:t>
+              <a:t>Setup: Install the Back Office Assistant</a:t>
             </a:r>
           </a:p>
         </p:txBody>
@@ -15575,7 +15575,7 @@
               </a:defRPr>
             </a:pPr>
             <a:r>
-              <a:t>02-ai-foundation-hello</a:t>
+              <a:t>Exercise 19: Hello AI - A Storefront API Backed by an LLM</a:t>
             </a:r>
           </a:p>
         </p:txBody>
@@ -20657,7 +20657,7 @@
               </a:defRPr>
             </a:pPr>
             <a:r>
-              <a:t>03-ai-foundation-catalog</a:t>
+              <a:t>Exercise 20: Ask the Catalog - Tool Calling and Structured Answers</a:t>
             </a:r>
           </a:p>
         </p:txBody>
@@ -28574,7 +28574,7 @@
               </a:defRPr>
             </a:pPr>
             <a:r>
-              <a:t>04-ai-foundation-agent</a:t>
+              <a:t>Exercise 21: AI Foundation - Product Creation Agent</a:t>
             </a:r>
           </a:p>
         </p:txBody>

--- a/guides-pptx/spryker-academy-ai.pptx
+++ b/guides-pptx/spryker-academy-ai.pptx
@@ -16051,7 +16051,7 @@
               </a:defRPr>
             </a:pPr>
             <a:r>
-              <a:t>• Completed Exercise 12 (Glue Storefront API). You know resource schemas, providers, and glue api:generate .</a:t>
+              <a:t>• Completed Exercise 12 (Glue Storefront and Backend API). You know resource schemas, providers, and glue api:generate .</a:t>
             </a:r>
           </a:p>
         </p:txBody>
@@ -19298,205 +19298,7 @@
               </a:defRPr>
             </a:pPr>
             <a:r>
-              <a:t>❝ Why glue cache:clear ? The Glue application compiles a Symfony container that caches the API Platform source directories and routes, and cache:empty-all does not touch it. In the demo shop glue.eu.spryker.local is served by the GLUE application, so that is the one to generate and clear ( GLUE_STOREFRONT is not the application behind that host). If the endpoint still answers 404 or 500, see Troubleshooting in the Glue Storefront API guide .</a:t>
-            </a:r>
-          </a:p>
-          <a:p>
-            <a:pPr>
-              <a:spcAft>
-                <a:spcPts val="800"/>
-              </a:spcAft>
-              <a:defRPr sz="1600">
-                <a:solidFill>
-                  <a:srgbClr val="1A1A1A"/>
-                </a:solidFill>
-              </a:defRPr>
-            </a:pPr>
-            <a:r>
-              <a:t>Send the first message:</a:t>
-            </a:r>
-          </a:p>
-          <a:p>
-            <a:pPr>
-              <a:spcBef>
-                <a:spcPts val="0"/>
-              </a:spcBef>
-              <a:spcAft>
-                <a:spcPts val="0"/>
-              </a:spcAft>
-            </a:pPr>
-            <a:r>
-              <a:rPr sz="900">
-                <a:solidFill>
-                  <a:srgbClr val="2D2D2D"/>
-                </a:solidFill>
-                <a:latin typeface="Consolas"/>
-              </a:rPr>
-              <a:t>curl</a:t>
-            </a:r>
-            <a:r>
-              <a:rPr sz="900">
-                <a:solidFill>
-                  <a:srgbClr val="2D2D2D"/>
-                </a:solidFill>
-                <a:latin typeface="Consolas"/>
-              </a:rPr>
-              <a:t> </a:t>
-            </a:r>
-            <a:r>
-              <a:rPr sz="900">
-                <a:solidFill>
-                  <a:srgbClr val="2D2D2D"/>
-                </a:solidFill>
-                <a:latin typeface="Consolas"/>
-              </a:rPr>
-              <a:t>-s</a:t>
-            </a:r>
-            <a:r>
-              <a:rPr sz="900">
-                <a:solidFill>
-                  <a:srgbClr val="2D2D2D"/>
-                </a:solidFill>
-                <a:latin typeface="Consolas"/>
-              </a:rPr>
-              <a:t> </a:t>
-            </a:r>
-            <a:r>
-              <a:rPr sz="900">
-                <a:solidFill>
-                  <a:srgbClr val="2D2D2D"/>
-                </a:solidFill>
-                <a:latin typeface="Consolas"/>
-              </a:rPr>
-              <a:t>-X</a:t>
-            </a:r>
-            <a:r>
-              <a:rPr sz="900">
-                <a:solidFill>
-                  <a:srgbClr val="2D2D2D"/>
-                </a:solidFill>
-                <a:latin typeface="Consolas"/>
-              </a:rPr>
-              <a:t> POST http://glue.eu.spryker.local/ai-chats </a:t>
-            </a:r>
-            <a:r>
-              <a:rPr sz="900">
-                <a:solidFill>
-                  <a:srgbClr val="902000"/>
-                </a:solidFill>
-                <a:latin typeface="Consolas"/>
-              </a:rPr>
-              <a:t>\</a:t>
-            </a:r>
-          </a:p>
-          <a:p>
-            <a:pPr>
-              <a:spcBef>
-                <a:spcPts val="0"/>
-              </a:spcBef>
-              <a:spcAft>
-                <a:spcPts val="0"/>
-              </a:spcAft>
-            </a:pPr>
-            <a:r>
-              <a:rPr sz="900">
-                <a:solidFill>
-                  <a:srgbClr val="2D2D2D"/>
-                </a:solidFill>
-                <a:latin typeface="Consolas"/>
-              </a:rPr>
-              <a:t>  </a:t>
-            </a:r>
-            <a:r>
-              <a:rPr sz="900">
-                <a:solidFill>
-                  <a:srgbClr val="2D2D2D"/>
-                </a:solidFill>
-                <a:latin typeface="Consolas"/>
-              </a:rPr>
-              <a:t>-H</a:t>
-            </a:r>
-            <a:r>
-              <a:rPr sz="900">
-                <a:solidFill>
-                  <a:srgbClr val="2D2D2D"/>
-                </a:solidFill>
-                <a:latin typeface="Consolas"/>
-              </a:rPr>
-              <a:t> </a:t>
-            </a:r>
-            <a:r>
-              <a:rPr sz="900">
-                <a:solidFill>
-                  <a:srgbClr val="4070A0"/>
-                </a:solidFill>
-                <a:latin typeface="Consolas"/>
-              </a:rPr>
-              <a:t>'Content-Type: application/vnd.api+json'</a:t>
-            </a:r>
-            <a:r>
-              <a:rPr sz="900">
-                <a:solidFill>
-                  <a:srgbClr val="2D2D2D"/>
-                </a:solidFill>
-                <a:latin typeface="Consolas"/>
-              </a:rPr>
-              <a:t> </a:t>
-            </a:r>
-            <a:r>
-              <a:rPr sz="900">
-                <a:solidFill>
-                  <a:srgbClr val="902000"/>
-                </a:solidFill>
-                <a:latin typeface="Consolas"/>
-              </a:rPr>
-              <a:t>\</a:t>
-            </a:r>
-          </a:p>
-          <a:p>
-            <a:pPr>
-              <a:spcBef>
-                <a:spcPts val="0"/>
-              </a:spcBef>
-              <a:spcAft>
-                <a:spcPts val="0"/>
-              </a:spcAft>
-            </a:pPr>
-            <a:r>
-              <a:rPr sz="900">
-                <a:solidFill>
-                  <a:srgbClr val="2D2D2D"/>
-                </a:solidFill>
-                <a:latin typeface="Consolas"/>
-              </a:rPr>
-              <a:t>  </a:t>
-            </a:r>
-            <a:r>
-              <a:rPr sz="900">
-                <a:solidFill>
-                  <a:srgbClr val="2D2D2D"/>
-                </a:solidFill>
-                <a:latin typeface="Consolas"/>
-              </a:rPr>
-              <a:t>-d</a:t>
-            </a:r>
-            <a:r>
-              <a:rPr sz="900">
-                <a:solidFill>
-                  <a:srgbClr val="2D2D2D"/>
-                </a:solidFill>
-                <a:latin typeface="Consolas"/>
-              </a:rPr>
-              <a:t> </a:t>
-            </a:r>
-            <a:r>
-              <a:rPr sz="900">
-                <a:solidFill>
-                  <a:srgbClr val="4070A0"/>
-                </a:solidFill>
-                <a:latin typeface="Consolas"/>
-              </a:rPr>
-              <a:t>'{"data":{"type":"ai-chats","attributes":{"message":"Hello world! My name is Hidran."}}}'</a:t>
+              <a:t>❝ Why glue cache:clear ? The Glue application compiles a Symfony container that caches the API Platform source directories and routes, and cache:empty-all does not touch it. In the demo shop glue.eu.spryker.local is served by the GLUE application, so that is the one to generate and clear ( GLUE_STOREFRONT is not the application behind that host). api:generate only writes the resource classes; the cache is what Glue serves from, so it has to be rebuilt after every generate. The full explanation is Why cache:clear Follows api:generate in the Glue Storefront API guide ; if the endpoint still answers 404 or 500, see Troubleshooting there.</a:t>
             </a:r>
           </a:p>
         </p:txBody>
@@ -19618,6 +19420,204 @@
             <a:spAutoFit/>
           </a:bodyPr>
           <a:lstStyle/>
+          <a:p>
+            <a:pPr>
+              <a:spcAft>
+                <a:spcPts val="800"/>
+              </a:spcAft>
+              <a:defRPr sz="1600">
+                <a:solidFill>
+                  <a:srgbClr val="1A1A1A"/>
+                </a:solidFill>
+              </a:defRPr>
+            </a:pPr>
+            <a:r>
+              <a:t>Send the first message:</a:t>
+            </a:r>
+          </a:p>
+          <a:p>
+            <a:pPr>
+              <a:spcBef>
+                <a:spcPts val="0"/>
+              </a:spcBef>
+              <a:spcAft>
+                <a:spcPts val="0"/>
+              </a:spcAft>
+            </a:pPr>
+            <a:r>
+              <a:rPr sz="900">
+                <a:solidFill>
+                  <a:srgbClr val="2D2D2D"/>
+                </a:solidFill>
+                <a:latin typeface="Consolas"/>
+              </a:rPr>
+              <a:t>curl</a:t>
+            </a:r>
+            <a:r>
+              <a:rPr sz="900">
+                <a:solidFill>
+                  <a:srgbClr val="2D2D2D"/>
+                </a:solidFill>
+                <a:latin typeface="Consolas"/>
+              </a:rPr>
+              <a:t> </a:t>
+            </a:r>
+            <a:r>
+              <a:rPr sz="900">
+                <a:solidFill>
+                  <a:srgbClr val="2D2D2D"/>
+                </a:solidFill>
+                <a:latin typeface="Consolas"/>
+              </a:rPr>
+              <a:t>-s</a:t>
+            </a:r>
+            <a:r>
+              <a:rPr sz="900">
+                <a:solidFill>
+                  <a:srgbClr val="2D2D2D"/>
+                </a:solidFill>
+                <a:latin typeface="Consolas"/>
+              </a:rPr>
+              <a:t> </a:t>
+            </a:r>
+            <a:r>
+              <a:rPr sz="900">
+                <a:solidFill>
+                  <a:srgbClr val="2D2D2D"/>
+                </a:solidFill>
+                <a:latin typeface="Consolas"/>
+              </a:rPr>
+              <a:t>-X</a:t>
+            </a:r>
+            <a:r>
+              <a:rPr sz="900">
+                <a:solidFill>
+                  <a:srgbClr val="2D2D2D"/>
+                </a:solidFill>
+                <a:latin typeface="Consolas"/>
+              </a:rPr>
+              <a:t> POST http://glue.eu.spryker.local/ai-chats </a:t>
+            </a:r>
+            <a:r>
+              <a:rPr sz="900">
+                <a:solidFill>
+                  <a:srgbClr val="902000"/>
+                </a:solidFill>
+                <a:latin typeface="Consolas"/>
+              </a:rPr>
+              <a:t>\</a:t>
+            </a:r>
+          </a:p>
+          <a:p>
+            <a:pPr>
+              <a:spcBef>
+                <a:spcPts val="0"/>
+              </a:spcBef>
+              <a:spcAft>
+                <a:spcPts val="0"/>
+              </a:spcAft>
+            </a:pPr>
+            <a:r>
+              <a:rPr sz="900">
+                <a:solidFill>
+                  <a:srgbClr val="2D2D2D"/>
+                </a:solidFill>
+                <a:latin typeface="Consolas"/>
+              </a:rPr>
+              <a:t>  </a:t>
+            </a:r>
+            <a:r>
+              <a:rPr sz="900">
+                <a:solidFill>
+                  <a:srgbClr val="2D2D2D"/>
+                </a:solidFill>
+                <a:latin typeface="Consolas"/>
+              </a:rPr>
+              <a:t>-H</a:t>
+            </a:r>
+            <a:r>
+              <a:rPr sz="900">
+                <a:solidFill>
+                  <a:srgbClr val="2D2D2D"/>
+                </a:solidFill>
+                <a:latin typeface="Consolas"/>
+              </a:rPr>
+              <a:t> </a:t>
+            </a:r>
+            <a:r>
+              <a:rPr sz="900">
+                <a:solidFill>
+                  <a:srgbClr val="4070A0"/>
+                </a:solidFill>
+                <a:latin typeface="Consolas"/>
+              </a:rPr>
+              <a:t>'Content-Type: application/vnd.api+json'</a:t>
+            </a:r>
+            <a:r>
+              <a:rPr sz="900">
+                <a:solidFill>
+                  <a:srgbClr val="2D2D2D"/>
+                </a:solidFill>
+                <a:latin typeface="Consolas"/>
+              </a:rPr>
+              <a:t> </a:t>
+            </a:r>
+            <a:r>
+              <a:rPr sz="900">
+                <a:solidFill>
+                  <a:srgbClr val="902000"/>
+                </a:solidFill>
+                <a:latin typeface="Consolas"/>
+              </a:rPr>
+              <a:t>\</a:t>
+            </a:r>
+          </a:p>
+          <a:p>
+            <a:pPr>
+              <a:spcBef>
+                <a:spcPts val="0"/>
+              </a:spcBef>
+              <a:spcAft>
+                <a:spcPts val="0"/>
+              </a:spcAft>
+            </a:pPr>
+            <a:r>
+              <a:rPr sz="900">
+                <a:solidFill>
+                  <a:srgbClr val="2D2D2D"/>
+                </a:solidFill>
+                <a:latin typeface="Consolas"/>
+              </a:rPr>
+              <a:t>  </a:t>
+            </a:r>
+            <a:r>
+              <a:rPr sz="900">
+                <a:solidFill>
+                  <a:srgbClr val="2D2D2D"/>
+                </a:solidFill>
+                <a:latin typeface="Consolas"/>
+              </a:rPr>
+              <a:t>-d</a:t>
+            </a:r>
+            <a:r>
+              <a:rPr sz="900">
+                <a:solidFill>
+                  <a:srgbClr val="2D2D2D"/>
+                </a:solidFill>
+                <a:latin typeface="Consolas"/>
+              </a:rPr>
+              <a:t> </a:t>
+            </a:r>
+            <a:r>
+              <a:rPr sz="900">
+                <a:solidFill>
+                  <a:srgbClr val="4070A0"/>
+                </a:solidFill>
+                <a:latin typeface="Consolas"/>
+              </a:rPr>
+              <a:t>'{"data":{"type":"ai-chats","attributes":{"message":"Hello world! My name is Hidran."}}}'</a:t>
+            </a:r>
+          </a:p>
           <a:p>
             <a:pPr>
               <a:spcBef>
